--- a/public/videos/repositories/laravel-posting-app/laravel-posting-app-tech-preview.pptx
+++ b/public/videos/repositories/laravel-posting-app/laravel-posting-app-tech-preview.pptx
@@ -134,7 +134,7 @@
           <p:cNvPr id="2" name="タイトル 1">
             <a:extLst>
               <a:ext uri="{FF2B5EF4-FFF2-40B4-BE49-F238E27FC236}">
-                <a16:creationId xmlns:a16="http://schemas.microsoft.com/office/drawing/2014/main" id="{D65870E5-BCB4-EE21-6621-465F95D3CFFE}"/>
+                <a16:creationId xmlns:a16="http://schemas.microsoft.com/office/drawing/2014/main" id="{62598A04-4C8C-3410-E6C6-A14F5EEC95FF}"/>
               </a:ext>
             </a:extLst>
           </p:cNvPr>
@@ -171,7 +171,7 @@
           <p:cNvPr id="3" name="字幕 2">
             <a:extLst>
               <a:ext uri="{FF2B5EF4-FFF2-40B4-BE49-F238E27FC236}">
-                <a16:creationId xmlns:a16="http://schemas.microsoft.com/office/drawing/2014/main" id="{1C9D9DB8-7813-F870-F08F-2F023B7A8197}"/>
+                <a16:creationId xmlns:a16="http://schemas.microsoft.com/office/drawing/2014/main" id="{0B43F289-F3F9-DDD3-E1F3-4D7FF1057ED0}"/>
               </a:ext>
             </a:extLst>
           </p:cNvPr>
@@ -241,7 +241,7 @@
           <p:cNvPr id="4" name="日付プレースホルダー 3">
             <a:extLst>
               <a:ext uri="{FF2B5EF4-FFF2-40B4-BE49-F238E27FC236}">
-                <a16:creationId xmlns:a16="http://schemas.microsoft.com/office/drawing/2014/main" id="{DBC241A3-CE7E-8CBA-EAB2-252FF767BACE}"/>
+                <a16:creationId xmlns:a16="http://schemas.microsoft.com/office/drawing/2014/main" id="{4226AC97-1E96-6742-DD6B-ABCD62FCD316}"/>
               </a:ext>
             </a:extLst>
           </p:cNvPr>
@@ -257,7 +257,7 @@
           <a:bodyPr/>
           <a:lstStyle/>
           <a:p>
-            <a:fld id="{8228C3E9-62B0-4913-9FEF-24C0F66CC692}" type="datetimeFigureOut">
+            <a:fld id="{748D11BB-60A2-44D6-850A-31AD77DE6E7A}" type="datetimeFigureOut">
               <a:rPr kumimoji="1" lang="ja-JP" altLang="en-US" smtClean="0"/>
               <a:t>2026/7/30</a:t>
             </a:fld>
@@ -270,7 +270,7 @@
           <p:cNvPr id="5" name="フッター プレースホルダー 4">
             <a:extLst>
               <a:ext uri="{FF2B5EF4-FFF2-40B4-BE49-F238E27FC236}">
-                <a16:creationId xmlns:a16="http://schemas.microsoft.com/office/drawing/2014/main" id="{DD6A3333-0073-474A-4D7D-5EFC44C80613}"/>
+                <a16:creationId xmlns:a16="http://schemas.microsoft.com/office/drawing/2014/main" id="{5AEF11E5-C36E-5EC8-9ED8-361DC15D17AD}"/>
               </a:ext>
             </a:extLst>
           </p:cNvPr>
@@ -295,7 +295,7 @@
           <p:cNvPr id="6" name="スライド番号プレースホルダー 5">
             <a:extLst>
               <a:ext uri="{FF2B5EF4-FFF2-40B4-BE49-F238E27FC236}">
-                <a16:creationId xmlns:a16="http://schemas.microsoft.com/office/drawing/2014/main" id="{AD50F07B-BF4C-715B-C008-2C6F5A170C02}"/>
+                <a16:creationId xmlns:a16="http://schemas.microsoft.com/office/drawing/2014/main" id="{AAFE750D-1F41-5F17-4E5E-F5CC507B5B53}"/>
               </a:ext>
             </a:extLst>
           </p:cNvPr>
@@ -311,7 +311,7 @@
           <a:bodyPr/>
           <a:lstStyle/>
           <a:p>
-            <a:fld id="{82866816-3BA9-466F-9365-FD6AB950324E}" type="slidenum">
+            <a:fld id="{4450D7FB-1E61-44A1-BEC8-ACF57906F333}" type="slidenum">
               <a:rPr kumimoji="1" lang="ja-JP" altLang="en-US" smtClean="0"/>
               <a:t>‹#›</a:t>
             </a:fld>
@@ -322,7 +322,7 @@
     </p:spTree>
     <p:extLst>
       <p:ext uri="{BB962C8B-B14F-4D97-AF65-F5344CB8AC3E}">
-        <p14:creationId xmlns:p14="http://schemas.microsoft.com/office/powerpoint/2010/main" val="2160199533"/>
+        <p14:creationId xmlns:p14="http://schemas.microsoft.com/office/powerpoint/2010/main" val="3096957577"/>
       </p:ext>
     </p:extLst>
   </p:cSld>
@@ -354,7 +354,7 @@
           <p:cNvPr id="2" name="タイトル 1">
             <a:extLst>
               <a:ext uri="{FF2B5EF4-FFF2-40B4-BE49-F238E27FC236}">
-                <a16:creationId xmlns:a16="http://schemas.microsoft.com/office/drawing/2014/main" id="{7BCF74BA-B85E-8C90-218F-F73A8E022096}"/>
+                <a16:creationId xmlns:a16="http://schemas.microsoft.com/office/drawing/2014/main" id="{8E6D776B-F1B0-526F-24C7-F9080F6E9EF2}"/>
               </a:ext>
             </a:extLst>
           </p:cNvPr>
@@ -382,7 +382,7 @@
           <p:cNvPr id="3" name="縦書きテキスト プレースホルダー 2">
             <a:extLst>
               <a:ext uri="{FF2B5EF4-FFF2-40B4-BE49-F238E27FC236}">
-                <a16:creationId xmlns:a16="http://schemas.microsoft.com/office/drawing/2014/main" id="{B507A842-BD8B-F190-A8FB-22D04B171032}"/>
+                <a16:creationId xmlns:a16="http://schemas.microsoft.com/office/drawing/2014/main" id="{3A975B0C-8678-023C-E6C5-6EE5FF005CCA}"/>
               </a:ext>
             </a:extLst>
           </p:cNvPr>
@@ -471,7 +471,7 @@
           <p:cNvPr id="4" name="日付プレースホルダー 3">
             <a:extLst>
               <a:ext uri="{FF2B5EF4-FFF2-40B4-BE49-F238E27FC236}">
-                <a16:creationId xmlns:a16="http://schemas.microsoft.com/office/drawing/2014/main" id="{D8BA9157-36DB-E327-D5E8-11071B915F03}"/>
+                <a16:creationId xmlns:a16="http://schemas.microsoft.com/office/drawing/2014/main" id="{B0470AC7-A64A-2E8B-5162-CD7D0CC8D053}"/>
               </a:ext>
             </a:extLst>
           </p:cNvPr>
@@ -487,7 +487,7 @@
           <a:bodyPr/>
           <a:lstStyle/>
           <a:p>
-            <a:fld id="{8228C3E9-62B0-4913-9FEF-24C0F66CC692}" type="datetimeFigureOut">
+            <a:fld id="{748D11BB-60A2-44D6-850A-31AD77DE6E7A}" type="datetimeFigureOut">
               <a:rPr kumimoji="1" lang="ja-JP" altLang="en-US" smtClean="0"/>
               <a:t>2026/7/30</a:t>
             </a:fld>
@@ -500,7 +500,7 @@
           <p:cNvPr id="5" name="フッター プレースホルダー 4">
             <a:extLst>
               <a:ext uri="{FF2B5EF4-FFF2-40B4-BE49-F238E27FC236}">
-                <a16:creationId xmlns:a16="http://schemas.microsoft.com/office/drawing/2014/main" id="{E1494460-4461-510F-5A56-3A9417EEA99A}"/>
+                <a16:creationId xmlns:a16="http://schemas.microsoft.com/office/drawing/2014/main" id="{E95C3D90-8E88-21C7-3842-D366571F9CBF}"/>
               </a:ext>
             </a:extLst>
           </p:cNvPr>
@@ -525,7 +525,7 @@
           <p:cNvPr id="6" name="スライド番号プレースホルダー 5">
             <a:extLst>
               <a:ext uri="{FF2B5EF4-FFF2-40B4-BE49-F238E27FC236}">
-                <a16:creationId xmlns:a16="http://schemas.microsoft.com/office/drawing/2014/main" id="{F0530C6F-E1C2-EB66-7AE6-D775D7CD34E1}"/>
+                <a16:creationId xmlns:a16="http://schemas.microsoft.com/office/drawing/2014/main" id="{38397FB8-81C8-D71F-452F-75E9F4606B4A}"/>
               </a:ext>
             </a:extLst>
           </p:cNvPr>
@@ -541,7 +541,7 @@
           <a:bodyPr/>
           <a:lstStyle/>
           <a:p>
-            <a:fld id="{82866816-3BA9-466F-9365-FD6AB950324E}" type="slidenum">
+            <a:fld id="{4450D7FB-1E61-44A1-BEC8-ACF57906F333}" type="slidenum">
               <a:rPr kumimoji="1" lang="ja-JP" altLang="en-US" smtClean="0"/>
               <a:t>‹#›</a:t>
             </a:fld>
@@ -552,7 +552,7 @@
     </p:spTree>
     <p:extLst>
       <p:ext uri="{BB962C8B-B14F-4D97-AF65-F5344CB8AC3E}">
-        <p14:creationId xmlns:p14="http://schemas.microsoft.com/office/powerpoint/2010/main" val="2050667036"/>
+        <p14:creationId xmlns:p14="http://schemas.microsoft.com/office/powerpoint/2010/main" val="4109082140"/>
       </p:ext>
     </p:extLst>
   </p:cSld>
@@ -584,7 +584,7 @@
           <p:cNvPr id="2" name="縦書きタイトル 1">
             <a:extLst>
               <a:ext uri="{FF2B5EF4-FFF2-40B4-BE49-F238E27FC236}">
-                <a16:creationId xmlns:a16="http://schemas.microsoft.com/office/drawing/2014/main" id="{107BC232-FBCB-F16B-3257-739401051E92}"/>
+                <a16:creationId xmlns:a16="http://schemas.microsoft.com/office/drawing/2014/main" id="{E971231E-F9C8-E0FF-576E-65261AF58DCC}"/>
               </a:ext>
             </a:extLst>
           </p:cNvPr>
@@ -617,7 +617,7 @@
           <p:cNvPr id="3" name="縦書きテキスト プレースホルダー 2">
             <a:extLst>
               <a:ext uri="{FF2B5EF4-FFF2-40B4-BE49-F238E27FC236}">
-                <a16:creationId xmlns:a16="http://schemas.microsoft.com/office/drawing/2014/main" id="{2F4FCFBE-6DD1-CA22-7242-B45F2E091F66}"/>
+                <a16:creationId xmlns:a16="http://schemas.microsoft.com/office/drawing/2014/main" id="{0DBA6ABB-1A3F-C4EF-BA5D-26D4B610FC0A}"/>
               </a:ext>
             </a:extLst>
           </p:cNvPr>
@@ -711,7 +711,7 @@
           <p:cNvPr id="4" name="日付プレースホルダー 3">
             <a:extLst>
               <a:ext uri="{FF2B5EF4-FFF2-40B4-BE49-F238E27FC236}">
-                <a16:creationId xmlns:a16="http://schemas.microsoft.com/office/drawing/2014/main" id="{D07CDEBC-8D8E-7DA3-69B1-612E574C0266}"/>
+                <a16:creationId xmlns:a16="http://schemas.microsoft.com/office/drawing/2014/main" id="{6B22E395-1980-7540-E52F-41D03D26EC2C}"/>
               </a:ext>
             </a:extLst>
           </p:cNvPr>
@@ -727,7 +727,7 @@
           <a:bodyPr/>
           <a:lstStyle/>
           <a:p>
-            <a:fld id="{8228C3E9-62B0-4913-9FEF-24C0F66CC692}" type="datetimeFigureOut">
+            <a:fld id="{748D11BB-60A2-44D6-850A-31AD77DE6E7A}" type="datetimeFigureOut">
               <a:rPr kumimoji="1" lang="ja-JP" altLang="en-US" smtClean="0"/>
               <a:t>2026/7/30</a:t>
             </a:fld>
@@ -740,7 +740,7 @@
           <p:cNvPr id="5" name="フッター プレースホルダー 4">
             <a:extLst>
               <a:ext uri="{FF2B5EF4-FFF2-40B4-BE49-F238E27FC236}">
-                <a16:creationId xmlns:a16="http://schemas.microsoft.com/office/drawing/2014/main" id="{831BE1C2-2AD1-D6E8-7853-12420FA32ACA}"/>
+                <a16:creationId xmlns:a16="http://schemas.microsoft.com/office/drawing/2014/main" id="{8E1EDC38-5B98-2F70-3F32-3EAF54BEA6A5}"/>
               </a:ext>
             </a:extLst>
           </p:cNvPr>
@@ -765,7 +765,7 @@
           <p:cNvPr id="6" name="スライド番号プレースホルダー 5">
             <a:extLst>
               <a:ext uri="{FF2B5EF4-FFF2-40B4-BE49-F238E27FC236}">
-                <a16:creationId xmlns:a16="http://schemas.microsoft.com/office/drawing/2014/main" id="{C8C77662-E539-942C-32AF-632D53B568DD}"/>
+                <a16:creationId xmlns:a16="http://schemas.microsoft.com/office/drawing/2014/main" id="{E414E1A1-BDEA-777E-F85A-D18E184B162B}"/>
               </a:ext>
             </a:extLst>
           </p:cNvPr>
@@ -781,7 +781,7 @@
           <a:bodyPr/>
           <a:lstStyle/>
           <a:p>
-            <a:fld id="{82866816-3BA9-466F-9365-FD6AB950324E}" type="slidenum">
+            <a:fld id="{4450D7FB-1E61-44A1-BEC8-ACF57906F333}" type="slidenum">
               <a:rPr kumimoji="1" lang="ja-JP" altLang="en-US" smtClean="0"/>
               <a:t>‹#›</a:t>
             </a:fld>
@@ -792,7 +792,7 @@
     </p:spTree>
     <p:extLst>
       <p:ext uri="{BB962C8B-B14F-4D97-AF65-F5344CB8AC3E}">
-        <p14:creationId xmlns:p14="http://schemas.microsoft.com/office/powerpoint/2010/main" val="1814357297"/>
+        <p14:creationId xmlns:p14="http://schemas.microsoft.com/office/powerpoint/2010/main" val="2408618034"/>
       </p:ext>
     </p:extLst>
   </p:cSld>
@@ -824,7 +824,7 @@
           <p:cNvPr id="2" name="タイトル 1">
             <a:extLst>
               <a:ext uri="{FF2B5EF4-FFF2-40B4-BE49-F238E27FC236}">
-                <a16:creationId xmlns:a16="http://schemas.microsoft.com/office/drawing/2014/main" id="{D06A4E23-DD3B-F443-130C-3B0DC6BE064D}"/>
+                <a16:creationId xmlns:a16="http://schemas.microsoft.com/office/drawing/2014/main" id="{58E1FF6D-E19C-11A5-BFB0-1E8AE4F9A493}"/>
               </a:ext>
             </a:extLst>
           </p:cNvPr>
@@ -852,7 +852,7 @@
           <p:cNvPr id="3" name="コンテンツ プレースホルダー 2">
             <a:extLst>
               <a:ext uri="{FF2B5EF4-FFF2-40B4-BE49-F238E27FC236}">
-                <a16:creationId xmlns:a16="http://schemas.microsoft.com/office/drawing/2014/main" id="{0534A275-1818-49D6-C671-F7F042216A87}"/>
+                <a16:creationId xmlns:a16="http://schemas.microsoft.com/office/drawing/2014/main" id="{F538977E-1EA8-93B3-CA57-6E320BFE8A39}"/>
               </a:ext>
             </a:extLst>
           </p:cNvPr>
@@ -941,7 +941,7 @@
           <p:cNvPr id="4" name="日付プレースホルダー 3">
             <a:extLst>
               <a:ext uri="{FF2B5EF4-FFF2-40B4-BE49-F238E27FC236}">
-                <a16:creationId xmlns:a16="http://schemas.microsoft.com/office/drawing/2014/main" id="{BF298E4C-39C9-A24B-461A-78794FC908B5}"/>
+                <a16:creationId xmlns:a16="http://schemas.microsoft.com/office/drawing/2014/main" id="{D0CA30CA-1032-05DB-0A02-A4593A400D63}"/>
               </a:ext>
             </a:extLst>
           </p:cNvPr>
@@ -957,7 +957,7 @@
           <a:bodyPr/>
           <a:lstStyle/>
           <a:p>
-            <a:fld id="{8228C3E9-62B0-4913-9FEF-24C0F66CC692}" type="datetimeFigureOut">
+            <a:fld id="{748D11BB-60A2-44D6-850A-31AD77DE6E7A}" type="datetimeFigureOut">
               <a:rPr kumimoji="1" lang="ja-JP" altLang="en-US" smtClean="0"/>
               <a:t>2026/7/30</a:t>
             </a:fld>
@@ -970,7 +970,7 @@
           <p:cNvPr id="5" name="フッター プレースホルダー 4">
             <a:extLst>
               <a:ext uri="{FF2B5EF4-FFF2-40B4-BE49-F238E27FC236}">
-                <a16:creationId xmlns:a16="http://schemas.microsoft.com/office/drawing/2014/main" id="{A18BFB72-F374-A565-4BAA-794FDA4A6B71}"/>
+                <a16:creationId xmlns:a16="http://schemas.microsoft.com/office/drawing/2014/main" id="{5BFB6F2F-E412-5E4F-53BE-3AF767D2D867}"/>
               </a:ext>
             </a:extLst>
           </p:cNvPr>
@@ -995,7 +995,7 @@
           <p:cNvPr id="6" name="スライド番号プレースホルダー 5">
             <a:extLst>
               <a:ext uri="{FF2B5EF4-FFF2-40B4-BE49-F238E27FC236}">
-                <a16:creationId xmlns:a16="http://schemas.microsoft.com/office/drawing/2014/main" id="{7267C488-3A60-22DB-E683-30541AF496AB}"/>
+                <a16:creationId xmlns:a16="http://schemas.microsoft.com/office/drawing/2014/main" id="{BB02DABD-5667-6E5A-7AA0-107CD02A4DD8}"/>
               </a:ext>
             </a:extLst>
           </p:cNvPr>
@@ -1011,7 +1011,7 @@
           <a:bodyPr/>
           <a:lstStyle/>
           <a:p>
-            <a:fld id="{82866816-3BA9-466F-9365-FD6AB950324E}" type="slidenum">
+            <a:fld id="{4450D7FB-1E61-44A1-BEC8-ACF57906F333}" type="slidenum">
               <a:rPr kumimoji="1" lang="ja-JP" altLang="en-US" smtClean="0"/>
               <a:t>‹#›</a:t>
             </a:fld>
@@ -1022,7 +1022,7 @@
     </p:spTree>
     <p:extLst>
       <p:ext uri="{BB962C8B-B14F-4D97-AF65-F5344CB8AC3E}">
-        <p14:creationId xmlns:p14="http://schemas.microsoft.com/office/powerpoint/2010/main" val="2860936107"/>
+        <p14:creationId xmlns:p14="http://schemas.microsoft.com/office/powerpoint/2010/main" val="2753820853"/>
       </p:ext>
     </p:extLst>
   </p:cSld>
@@ -1054,7 +1054,7 @@
           <p:cNvPr id="2" name="タイトル 1">
             <a:extLst>
               <a:ext uri="{FF2B5EF4-FFF2-40B4-BE49-F238E27FC236}">
-                <a16:creationId xmlns:a16="http://schemas.microsoft.com/office/drawing/2014/main" id="{67B04C1D-D7DC-3C8F-DEBA-F21BB8B8390C}"/>
+                <a16:creationId xmlns:a16="http://schemas.microsoft.com/office/drawing/2014/main" id="{29FAB923-7455-1E37-19F9-E494062C1321}"/>
               </a:ext>
             </a:extLst>
           </p:cNvPr>
@@ -1091,7 +1091,7 @@
           <p:cNvPr id="3" name="テキスト プレースホルダー 2">
             <a:extLst>
               <a:ext uri="{FF2B5EF4-FFF2-40B4-BE49-F238E27FC236}">
-                <a16:creationId xmlns:a16="http://schemas.microsoft.com/office/drawing/2014/main" id="{4411A8BD-8790-CA2C-B8F8-F3BDD7DE01B9}"/>
+                <a16:creationId xmlns:a16="http://schemas.microsoft.com/office/drawing/2014/main" id="{7B205697-B5F3-1555-1F11-B9D7485C34F3}"/>
               </a:ext>
             </a:extLst>
           </p:cNvPr>
@@ -1216,7 +1216,7 @@
           <p:cNvPr id="4" name="日付プレースホルダー 3">
             <a:extLst>
               <a:ext uri="{FF2B5EF4-FFF2-40B4-BE49-F238E27FC236}">
-                <a16:creationId xmlns:a16="http://schemas.microsoft.com/office/drawing/2014/main" id="{C0D4AF2D-8832-EF27-4781-FB55DF564B81}"/>
+                <a16:creationId xmlns:a16="http://schemas.microsoft.com/office/drawing/2014/main" id="{C70E0113-4800-FD03-48B2-BC7E666C7E6E}"/>
               </a:ext>
             </a:extLst>
           </p:cNvPr>
@@ -1232,7 +1232,7 @@
           <a:bodyPr/>
           <a:lstStyle/>
           <a:p>
-            <a:fld id="{8228C3E9-62B0-4913-9FEF-24C0F66CC692}" type="datetimeFigureOut">
+            <a:fld id="{748D11BB-60A2-44D6-850A-31AD77DE6E7A}" type="datetimeFigureOut">
               <a:rPr kumimoji="1" lang="ja-JP" altLang="en-US" smtClean="0"/>
               <a:t>2026/7/30</a:t>
             </a:fld>
@@ -1245,7 +1245,7 @@
           <p:cNvPr id="5" name="フッター プレースホルダー 4">
             <a:extLst>
               <a:ext uri="{FF2B5EF4-FFF2-40B4-BE49-F238E27FC236}">
-                <a16:creationId xmlns:a16="http://schemas.microsoft.com/office/drawing/2014/main" id="{584471F8-3E3E-A1F4-AE25-BACBEFC60EA1}"/>
+                <a16:creationId xmlns:a16="http://schemas.microsoft.com/office/drawing/2014/main" id="{9F0D3CF4-137D-A9E6-73AD-13D882076613}"/>
               </a:ext>
             </a:extLst>
           </p:cNvPr>
@@ -1270,7 +1270,7 @@
           <p:cNvPr id="6" name="スライド番号プレースホルダー 5">
             <a:extLst>
               <a:ext uri="{FF2B5EF4-FFF2-40B4-BE49-F238E27FC236}">
-                <a16:creationId xmlns:a16="http://schemas.microsoft.com/office/drawing/2014/main" id="{003EBCFA-F1D4-00AB-D962-BDDBDE001D40}"/>
+                <a16:creationId xmlns:a16="http://schemas.microsoft.com/office/drawing/2014/main" id="{8C5B9E79-F107-4A1A-CD92-EF9B883384F7}"/>
               </a:ext>
             </a:extLst>
           </p:cNvPr>
@@ -1286,7 +1286,7 @@
           <a:bodyPr/>
           <a:lstStyle/>
           <a:p>
-            <a:fld id="{82866816-3BA9-466F-9365-FD6AB950324E}" type="slidenum">
+            <a:fld id="{4450D7FB-1E61-44A1-BEC8-ACF57906F333}" type="slidenum">
               <a:rPr kumimoji="1" lang="ja-JP" altLang="en-US" smtClean="0"/>
               <a:t>‹#›</a:t>
             </a:fld>
@@ -1297,7 +1297,7 @@
     </p:spTree>
     <p:extLst>
       <p:ext uri="{BB962C8B-B14F-4D97-AF65-F5344CB8AC3E}">
-        <p14:creationId xmlns:p14="http://schemas.microsoft.com/office/powerpoint/2010/main" val="160323252"/>
+        <p14:creationId xmlns:p14="http://schemas.microsoft.com/office/powerpoint/2010/main" val="4118306716"/>
       </p:ext>
     </p:extLst>
   </p:cSld>
@@ -1329,7 +1329,7 @@
           <p:cNvPr id="2" name="タイトル 1">
             <a:extLst>
               <a:ext uri="{FF2B5EF4-FFF2-40B4-BE49-F238E27FC236}">
-                <a16:creationId xmlns:a16="http://schemas.microsoft.com/office/drawing/2014/main" id="{9B23B300-24DA-F032-F732-0DC580C1E65B}"/>
+                <a16:creationId xmlns:a16="http://schemas.microsoft.com/office/drawing/2014/main" id="{8E4BD3D5-0725-624F-691D-29E806221AD6}"/>
               </a:ext>
             </a:extLst>
           </p:cNvPr>
@@ -1357,7 +1357,7 @@
           <p:cNvPr id="3" name="コンテンツ プレースホルダー 2">
             <a:extLst>
               <a:ext uri="{FF2B5EF4-FFF2-40B4-BE49-F238E27FC236}">
-                <a16:creationId xmlns:a16="http://schemas.microsoft.com/office/drawing/2014/main" id="{1BA8206C-C831-CC2A-D3B5-792A603F92AE}"/>
+                <a16:creationId xmlns:a16="http://schemas.microsoft.com/office/drawing/2014/main" id="{0E9005CB-4170-7309-5859-23B75DB8297F}"/>
               </a:ext>
             </a:extLst>
           </p:cNvPr>
@@ -1451,7 +1451,7 @@
           <p:cNvPr id="4" name="コンテンツ プレースホルダー 3">
             <a:extLst>
               <a:ext uri="{FF2B5EF4-FFF2-40B4-BE49-F238E27FC236}">
-                <a16:creationId xmlns:a16="http://schemas.microsoft.com/office/drawing/2014/main" id="{397C6971-07F2-2A41-18CA-1DE2670D5332}"/>
+                <a16:creationId xmlns:a16="http://schemas.microsoft.com/office/drawing/2014/main" id="{89956163-D66B-3C39-4CED-E9B552481605}"/>
               </a:ext>
             </a:extLst>
           </p:cNvPr>
@@ -1545,7 +1545,7 @@
           <p:cNvPr id="5" name="日付プレースホルダー 4">
             <a:extLst>
               <a:ext uri="{FF2B5EF4-FFF2-40B4-BE49-F238E27FC236}">
-                <a16:creationId xmlns:a16="http://schemas.microsoft.com/office/drawing/2014/main" id="{F7B78D74-DE88-5EF1-9BAB-CCFA53E72270}"/>
+                <a16:creationId xmlns:a16="http://schemas.microsoft.com/office/drawing/2014/main" id="{427FB07F-1C2F-8B7D-AA2D-CFE8F1FB9973}"/>
               </a:ext>
             </a:extLst>
           </p:cNvPr>
@@ -1561,7 +1561,7 @@
           <a:bodyPr/>
           <a:lstStyle/>
           <a:p>
-            <a:fld id="{8228C3E9-62B0-4913-9FEF-24C0F66CC692}" type="datetimeFigureOut">
+            <a:fld id="{748D11BB-60A2-44D6-850A-31AD77DE6E7A}" type="datetimeFigureOut">
               <a:rPr kumimoji="1" lang="ja-JP" altLang="en-US" smtClean="0"/>
               <a:t>2026/7/30</a:t>
             </a:fld>
@@ -1574,7 +1574,7 @@
           <p:cNvPr id="6" name="フッター プレースホルダー 5">
             <a:extLst>
               <a:ext uri="{FF2B5EF4-FFF2-40B4-BE49-F238E27FC236}">
-                <a16:creationId xmlns:a16="http://schemas.microsoft.com/office/drawing/2014/main" id="{91CF5940-FAC3-9F16-CF3E-E0079887E412}"/>
+                <a16:creationId xmlns:a16="http://schemas.microsoft.com/office/drawing/2014/main" id="{6F1B30C5-C982-605D-B7D9-FAF2E929CA8E}"/>
               </a:ext>
             </a:extLst>
           </p:cNvPr>
@@ -1599,7 +1599,7 @@
           <p:cNvPr id="7" name="スライド番号プレースホルダー 6">
             <a:extLst>
               <a:ext uri="{FF2B5EF4-FFF2-40B4-BE49-F238E27FC236}">
-                <a16:creationId xmlns:a16="http://schemas.microsoft.com/office/drawing/2014/main" id="{062194C3-3BB2-B4A2-1651-979C5CCD8CE1}"/>
+                <a16:creationId xmlns:a16="http://schemas.microsoft.com/office/drawing/2014/main" id="{3CC61715-1E35-80FB-8979-3BE654A24C3A}"/>
               </a:ext>
             </a:extLst>
           </p:cNvPr>
@@ -1615,7 +1615,7 @@
           <a:bodyPr/>
           <a:lstStyle/>
           <a:p>
-            <a:fld id="{82866816-3BA9-466F-9365-FD6AB950324E}" type="slidenum">
+            <a:fld id="{4450D7FB-1E61-44A1-BEC8-ACF57906F333}" type="slidenum">
               <a:rPr kumimoji="1" lang="ja-JP" altLang="en-US" smtClean="0"/>
               <a:t>‹#›</a:t>
             </a:fld>
@@ -1626,7 +1626,7 @@
     </p:spTree>
     <p:extLst>
       <p:ext uri="{BB962C8B-B14F-4D97-AF65-F5344CB8AC3E}">
-        <p14:creationId xmlns:p14="http://schemas.microsoft.com/office/powerpoint/2010/main" val="4283570316"/>
+        <p14:creationId xmlns:p14="http://schemas.microsoft.com/office/powerpoint/2010/main" val="159682544"/>
       </p:ext>
     </p:extLst>
   </p:cSld>
@@ -1658,7 +1658,7 @@
           <p:cNvPr id="2" name="タイトル 1">
             <a:extLst>
               <a:ext uri="{FF2B5EF4-FFF2-40B4-BE49-F238E27FC236}">
-                <a16:creationId xmlns:a16="http://schemas.microsoft.com/office/drawing/2014/main" id="{3EF6A860-48FF-C218-CBB1-409A1D607E5E}"/>
+                <a16:creationId xmlns:a16="http://schemas.microsoft.com/office/drawing/2014/main" id="{5C92BDF6-AEB4-53BB-AB50-331D4F2ECBF1}"/>
               </a:ext>
             </a:extLst>
           </p:cNvPr>
@@ -1691,7 +1691,7 @@
           <p:cNvPr id="3" name="テキスト プレースホルダー 2">
             <a:extLst>
               <a:ext uri="{FF2B5EF4-FFF2-40B4-BE49-F238E27FC236}">
-                <a16:creationId xmlns:a16="http://schemas.microsoft.com/office/drawing/2014/main" id="{774E5490-63EC-B9AB-3B14-9A5349B2D5B7}"/>
+                <a16:creationId xmlns:a16="http://schemas.microsoft.com/office/drawing/2014/main" id="{1B246492-3604-140E-4245-B1A18365C96A}"/>
               </a:ext>
             </a:extLst>
           </p:cNvPr>
@@ -1762,7 +1762,7 @@
           <p:cNvPr id="4" name="コンテンツ プレースホルダー 3">
             <a:extLst>
               <a:ext uri="{FF2B5EF4-FFF2-40B4-BE49-F238E27FC236}">
-                <a16:creationId xmlns:a16="http://schemas.microsoft.com/office/drawing/2014/main" id="{1DF81E71-793E-3934-0D7A-11E595B0F9A9}"/>
+                <a16:creationId xmlns:a16="http://schemas.microsoft.com/office/drawing/2014/main" id="{76C0FB51-2A1B-DF8F-348E-A72F7E591A19}"/>
               </a:ext>
             </a:extLst>
           </p:cNvPr>
@@ -1856,7 +1856,7 @@
           <p:cNvPr id="5" name="テキスト プレースホルダー 4">
             <a:extLst>
               <a:ext uri="{FF2B5EF4-FFF2-40B4-BE49-F238E27FC236}">
-                <a16:creationId xmlns:a16="http://schemas.microsoft.com/office/drawing/2014/main" id="{55FBA829-327C-14F1-D74F-011FF376DF7A}"/>
+                <a16:creationId xmlns:a16="http://schemas.microsoft.com/office/drawing/2014/main" id="{A9C164B5-765D-8482-CF69-FC5C6AD65EBA}"/>
               </a:ext>
             </a:extLst>
           </p:cNvPr>
@@ -1927,7 +1927,7 @@
           <p:cNvPr id="6" name="コンテンツ プレースホルダー 5">
             <a:extLst>
               <a:ext uri="{FF2B5EF4-FFF2-40B4-BE49-F238E27FC236}">
-                <a16:creationId xmlns:a16="http://schemas.microsoft.com/office/drawing/2014/main" id="{5606D875-ABDC-0B68-5AD8-FD13E301CD28}"/>
+                <a16:creationId xmlns:a16="http://schemas.microsoft.com/office/drawing/2014/main" id="{1294F21C-2AA0-C6EA-F0FA-CBA4D9C5D71D}"/>
               </a:ext>
             </a:extLst>
           </p:cNvPr>
@@ -2021,7 +2021,7 @@
           <p:cNvPr id="7" name="日付プレースホルダー 6">
             <a:extLst>
               <a:ext uri="{FF2B5EF4-FFF2-40B4-BE49-F238E27FC236}">
-                <a16:creationId xmlns:a16="http://schemas.microsoft.com/office/drawing/2014/main" id="{672B28BA-3139-AA05-1468-34AC5FD14068}"/>
+                <a16:creationId xmlns:a16="http://schemas.microsoft.com/office/drawing/2014/main" id="{119C34DD-09A2-6DEE-3C9F-EDFD6FDEACA6}"/>
               </a:ext>
             </a:extLst>
           </p:cNvPr>
@@ -2037,7 +2037,7 @@
           <a:bodyPr/>
           <a:lstStyle/>
           <a:p>
-            <a:fld id="{8228C3E9-62B0-4913-9FEF-24C0F66CC692}" type="datetimeFigureOut">
+            <a:fld id="{748D11BB-60A2-44D6-850A-31AD77DE6E7A}" type="datetimeFigureOut">
               <a:rPr kumimoji="1" lang="ja-JP" altLang="en-US" smtClean="0"/>
               <a:t>2026/7/30</a:t>
             </a:fld>
@@ -2050,7 +2050,7 @@
           <p:cNvPr id="8" name="フッター プレースホルダー 7">
             <a:extLst>
               <a:ext uri="{FF2B5EF4-FFF2-40B4-BE49-F238E27FC236}">
-                <a16:creationId xmlns:a16="http://schemas.microsoft.com/office/drawing/2014/main" id="{18015C5D-8A5F-F9D5-B667-F34262996A55}"/>
+                <a16:creationId xmlns:a16="http://schemas.microsoft.com/office/drawing/2014/main" id="{239F0C0E-08E0-E7D6-562E-FB459C1DF12E}"/>
               </a:ext>
             </a:extLst>
           </p:cNvPr>
@@ -2075,7 +2075,7 @@
           <p:cNvPr id="9" name="スライド番号プレースホルダー 8">
             <a:extLst>
               <a:ext uri="{FF2B5EF4-FFF2-40B4-BE49-F238E27FC236}">
-                <a16:creationId xmlns:a16="http://schemas.microsoft.com/office/drawing/2014/main" id="{0BDE42E5-F796-8143-5DE1-DF604A253E81}"/>
+                <a16:creationId xmlns:a16="http://schemas.microsoft.com/office/drawing/2014/main" id="{6750E738-51C6-FD0C-604B-E5D5B8C7667C}"/>
               </a:ext>
             </a:extLst>
           </p:cNvPr>
@@ -2091,7 +2091,7 @@
           <a:bodyPr/>
           <a:lstStyle/>
           <a:p>
-            <a:fld id="{82866816-3BA9-466F-9365-FD6AB950324E}" type="slidenum">
+            <a:fld id="{4450D7FB-1E61-44A1-BEC8-ACF57906F333}" type="slidenum">
               <a:rPr kumimoji="1" lang="ja-JP" altLang="en-US" smtClean="0"/>
               <a:t>‹#›</a:t>
             </a:fld>
@@ -2102,7 +2102,7 @@
     </p:spTree>
     <p:extLst>
       <p:ext uri="{BB962C8B-B14F-4D97-AF65-F5344CB8AC3E}">
-        <p14:creationId xmlns:p14="http://schemas.microsoft.com/office/powerpoint/2010/main" val="3059248949"/>
+        <p14:creationId xmlns:p14="http://schemas.microsoft.com/office/powerpoint/2010/main" val="3740362024"/>
       </p:ext>
     </p:extLst>
   </p:cSld>
@@ -2134,7 +2134,7 @@
           <p:cNvPr id="2" name="タイトル 1">
             <a:extLst>
               <a:ext uri="{FF2B5EF4-FFF2-40B4-BE49-F238E27FC236}">
-                <a16:creationId xmlns:a16="http://schemas.microsoft.com/office/drawing/2014/main" id="{9385147C-68E8-61DB-01BC-DD5779256C11}"/>
+                <a16:creationId xmlns:a16="http://schemas.microsoft.com/office/drawing/2014/main" id="{A741ECD1-C8A2-E589-2D6A-D34A25FA3752}"/>
               </a:ext>
             </a:extLst>
           </p:cNvPr>
@@ -2162,7 +2162,7 @@
           <p:cNvPr id="3" name="日付プレースホルダー 2">
             <a:extLst>
               <a:ext uri="{FF2B5EF4-FFF2-40B4-BE49-F238E27FC236}">
-                <a16:creationId xmlns:a16="http://schemas.microsoft.com/office/drawing/2014/main" id="{4FB3044B-9A44-42A5-13C3-6010EC5D4FF2}"/>
+                <a16:creationId xmlns:a16="http://schemas.microsoft.com/office/drawing/2014/main" id="{AA33B3EE-401B-55FA-F40F-E04768E69EDA}"/>
               </a:ext>
             </a:extLst>
           </p:cNvPr>
@@ -2178,7 +2178,7 @@
           <a:bodyPr/>
           <a:lstStyle/>
           <a:p>
-            <a:fld id="{8228C3E9-62B0-4913-9FEF-24C0F66CC692}" type="datetimeFigureOut">
+            <a:fld id="{748D11BB-60A2-44D6-850A-31AD77DE6E7A}" type="datetimeFigureOut">
               <a:rPr kumimoji="1" lang="ja-JP" altLang="en-US" smtClean="0"/>
               <a:t>2026/7/30</a:t>
             </a:fld>
@@ -2191,7 +2191,7 @@
           <p:cNvPr id="4" name="フッター プレースホルダー 3">
             <a:extLst>
               <a:ext uri="{FF2B5EF4-FFF2-40B4-BE49-F238E27FC236}">
-                <a16:creationId xmlns:a16="http://schemas.microsoft.com/office/drawing/2014/main" id="{2EDFFA84-5E1F-66D8-8D2C-E70FF670AA66}"/>
+                <a16:creationId xmlns:a16="http://schemas.microsoft.com/office/drawing/2014/main" id="{33E694EE-9292-F1A3-029E-41A4C5A7CC98}"/>
               </a:ext>
             </a:extLst>
           </p:cNvPr>
@@ -2216,7 +2216,7 @@
           <p:cNvPr id="5" name="スライド番号プレースホルダー 4">
             <a:extLst>
               <a:ext uri="{FF2B5EF4-FFF2-40B4-BE49-F238E27FC236}">
-                <a16:creationId xmlns:a16="http://schemas.microsoft.com/office/drawing/2014/main" id="{35879C1B-7FD6-475C-C049-CED5D8FCC443}"/>
+                <a16:creationId xmlns:a16="http://schemas.microsoft.com/office/drawing/2014/main" id="{CB39A70B-A28F-048D-C188-557C876AFEE5}"/>
               </a:ext>
             </a:extLst>
           </p:cNvPr>
@@ -2232,7 +2232,7 @@
           <a:bodyPr/>
           <a:lstStyle/>
           <a:p>
-            <a:fld id="{82866816-3BA9-466F-9365-FD6AB950324E}" type="slidenum">
+            <a:fld id="{4450D7FB-1E61-44A1-BEC8-ACF57906F333}" type="slidenum">
               <a:rPr kumimoji="1" lang="ja-JP" altLang="en-US" smtClean="0"/>
               <a:t>‹#›</a:t>
             </a:fld>
@@ -2243,7 +2243,7 @@
     </p:spTree>
     <p:extLst>
       <p:ext uri="{BB962C8B-B14F-4D97-AF65-F5344CB8AC3E}">
-        <p14:creationId xmlns:p14="http://schemas.microsoft.com/office/powerpoint/2010/main" val="628970179"/>
+        <p14:creationId xmlns:p14="http://schemas.microsoft.com/office/powerpoint/2010/main" val="525880630"/>
       </p:ext>
     </p:extLst>
   </p:cSld>
@@ -2275,7 +2275,7 @@
           <p:cNvPr id="2" name="日付プレースホルダー 1">
             <a:extLst>
               <a:ext uri="{FF2B5EF4-FFF2-40B4-BE49-F238E27FC236}">
-                <a16:creationId xmlns:a16="http://schemas.microsoft.com/office/drawing/2014/main" id="{9B62F7EF-1C42-7CDE-8B1B-153EC40E441B}"/>
+                <a16:creationId xmlns:a16="http://schemas.microsoft.com/office/drawing/2014/main" id="{FE609508-3617-1C3A-41C8-05D9BA5BE246}"/>
               </a:ext>
             </a:extLst>
           </p:cNvPr>
@@ -2291,7 +2291,7 @@
           <a:bodyPr/>
           <a:lstStyle/>
           <a:p>
-            <a:fld id="{8228C3E9-62B0-4913-9FEF-24C0F66CC692}" type="datetimeFigureOut">
+            <a:fld id="{748D11BB-60A2-44D6-850A-31AD77DE6E7A}" type="datetimeFigureOut">
               <a:rPr kumimoji="1" lang="ja-JP" altLang="en-US" smtClean="0"/>
               <a:t>2026/7/30</a:t>
             </a:fld>
@@ -2304,7 +2304,7 @@
           <p:cNvPr id="3" name="フッター プレースホルダー 2">
             <a:extLst>
               <a:ext uri="{FF2B5EF4-FFF2-40B4-BE49-F238E27FC236}">
-                <a16:creationId xmlns:a16="http://schemas.microsoft.com/office/drawing/2014/main" id="{CA6F4493-333A-88B0-C15C-14709EE63204}"/>
+                <a16:creationId xmlns:a16="http://schemas.microsoft.com/office/drawing/2014/main" id="{8F0822F9-0F08-FBEA-727C-E9A9A4BDAC0E}"/>
               </a:ext>
             </a:extLst>
           </p:cNvPr>
@@ -2329,7 +2329,7 @@
           <p:cNvPr id="4" name="スライド番号プレースホルダー 3">
             <a:extLst>
               <a:ext uri="{FF2B5EF4-FFF2-40B4-BE49-F238E27FC236}">
-                <a16:creationId xmlns:a16="http://schemas.microsoft.com/office/drawing/2014/main" id="{9F6EAC62-F2D8-A230-CE59-BBA08C9461AC}"/>
+                <a16:creationId xmlns:a16="http://schemas.microsoft.com/office/drawing/2014/main" id="{FDDB469A-8052-223C-DAED-A7A905058A31}"/>
               </a:ext>
             </a:extLst>
           </p:cNvPr>
@@ -2345,7 +2345,7 @@
           <a:bodyPr/>
           <a:lstStyle/>
           <a:p>
-            <a:fld id="{82866816-3BA9-466F-9365-FD6AB950324E}" type="slidenum">
+            <a:fld id="{4450D7FB-1E61-44A1-BEC8-ACF57906F333}" type="slidenum">
               <a:rPr kumimoji="1" lang="ja-JP" altLang="en-US" smtClean="0"/>
               <a:t>‹#›</a:t>
             </a:fld>
@@ -2356,7 +2356,7 @@
     </p:spTree>
     <p:extLst>
       <p:ext uri="{BB962C8B-B14F-4D97-AF65-F5344CB8AC3E}">
-        <p14:creationId xmlns:p14="http://schemas.microsoft.com/office/powerpoint/2010/main" val="4194183668"/>
+        <p14:creationId xmlns:p14="http://schemas.microsoft.com/office/powerpoint/2010/main" val="2717048814"/>
       </p:ext>
     </p:extLst>
   </p:cSld>
@@ -2388,7 +2388,7 @@
           <p:cNvPr id="2" name="タイトル 1">
             <a:extLst>
               <a:ext uri="{FF2B5EF4-FFF2-40B4-BE49-F238E27FC236}">
-                <a16:creationId xmlns:a16="http://schemas.microsoft.com/office/drawing/2014/main" id="{62203C63-41D9-AF14-F1CA-C45FAAD56642}"/>
+                <a16:creationId xmlns:a16="http://schemas.microsoft.com/office/drawing/2014/main" id="{D803066D-4A0C-4D01-513C-67F8CED274F0}"/>
               </a:ext>
             </a:extLst>
           </p:cNvPr>
@@ -2425,7 +2425,7 @@
           <p:cNvPr id="3" name="コンテンツ プレースホルダー 2">
             <a:extLst>
               <a:ext uri="{FF2B5EF4-FFF2-40B4-BE49-F238E27FC236}">
-                <a16:creationId xmlns:a16="http://schemas.microsoft.com/office/drawing/2014/main" id="{BB181213-36F8-3C43-00EF-82C17FD48238}"/>
+                <a16:creationId xmlns:a16="http://schemas.microsoft.com/office/drawing/2014/main" id="{40F3CF5E-79A0-F93B-C579-E8A02670EC31}"/>
               </a:ext>
             </a:extLst>
           </p:cNvPr>
@@ -2547,7 +2547,7 @@
           <p:cNvPr id="4" name="テキスト プレースホルダー 3">
             <a:extLst>
               <a:ext uri="{FF2B5EF4-FFF2-40B4-BE49-F238E27FC236}">
-                <a16:creationId xmlns:a16="http://schemas.microsoft.com/office/drawing/2014/main" id="{2221527B-A491-4C1A-47BB-B9966CAE9667}"/>
+                <a16:creationId xmlns:a16="http://schemas.microsoft.com/office/drawing/2014/main" id="{1146745C-B753-DD4A-6C1F-48711C6C0A14}"/>
               </a:ext>
             </a:extLst>
           </p:cNvPr>
@@ -2618,7 +2618,7 @@
           <p:cNvPr id="5" name="日付プレースホルダー 4">
             <a:extLst>
               <a:ext uri="{FF2B5EF4-FFF2-40B4-BE49-F238E27FC236}">
-                <a16:creationId xmlns:a16="http://schemas.microsoft.com/office/drawing/2014/main" id="{3765C50E-7B62-5062-9F74-FF6B729086E5}"/>
+                <a16:creationId xmlns:a16="http://schemas.microsoft.com/office/drawing/2014/main" id="{52047831-E681-B5CE-FA5A-B717D7A5F4A4}"/>
               </a:ext>
             </a:extLst>
           </p:cNvPr>
@@ -2634,7 +2634,7 @@
           <a:bodyPr/>
           <a:lstStyle/>
           <a:p>
-            <a:fld id="{8228C3E9-62B0-4913-9FEF-24C0F66CC692}" type="datetimeFigureOut">
+            <a:fld id="{748D11BB-60A2-44D6-850A-31AD77DE6E7A}" type="datetimeFigureOut">
               <a:rPr kumimoji="1" lang="ja-JP" altLang="en-US" smtClean="0"/>
               <a:t>2026/7/30</a:t>
             </a:fld>
@@ -2647,7 +2647,7 @@
           <p:cNvPr id="6" name="フッター プレースホルダー 5">
             <a:extLst>
               <a:ext uri="{FF2B5EF4-FFF2-40B4-BE49-F238E27FC236}">
-                <a16:creationId xmlns:a16="http://schemas.microsoft.com/office/drawing/2014/main" id="{8F61D805-67F6-A00F-72A9-FB706D2ADD30}"/>
+                <a16:creationId xmlns:a16="http://schemas.microsoft.com/office/drawing/2014/main" id="{1558FFE2-BA89-E67A-65C6-663732D7EAF7}"/>
               </a:ext>
             </a:extLst>
           </p:cNvPr>
@@ -2672,7 +2672,7 @@
           <p:cNvPr id="7" name="スライド番号プレースホルダー 6">
             <a:extLst>
               <a:ext uri="{FF2B5EF4-FFF2-40B4-BE49-F238E27FC236}">
-                <a16:creationId xmlns:a16="http://schemas.microsoft.com/office/drawing/2014/main" id="{A3B04CA0-08B8-5318-EF72-841DEFFE1869}"/>
+                <a16:creationId xmlns:a16="http://schemas.microsoft.com/office/drawing/2014/main" id="{61E519FD-64CA-4911-83CE-15F25A7BCAB6}"/>
               </a:ext>
             </a:extLst>
           </p:cNvPr>
@@ -2688,7 +2688,7 @@
           <a:bodyPr/>
           <a:lstStyle/>
           <a:p>
-            <a:fld id="{82866816-3BA9-466F-9365-FD6AB950324E}" type="slidenum">
+            <a:fld id="{4450D7FB-1E61-44A1-BEC8-ACF57906F333}" type="slidenum">
               <a:rPr kumimoji="1" lang="ja-JP" altLang="en-US" smtClean="0"/>
               <a:t>‹#›</a:t>
             </a:fld>
@@ -2699,7 +2699,7 @@
     </p:spTree>
     <p:extLst>
       <p:ext uri="{BB962C8B-B14F-4D97-AF65-F5344CB8AC3E}">
-        <p14:creationId xmlns:p14="http://schemas.microsoft.com/office/powerpoint/2010/main" val="61752477"/>
+        <p14:creationId xmlns:p14="http://schemas.microsoft.com/office/powerpoint/2010/main" val="4179841043"/>
       </p:ext>
     </p:extLst>
   </p:cSld>
@@ -2731,7 +2731,7 @@
           <p:cNvPr id="2" name="タイトル 1">
             <a:extLst>
               <a:ext uri="{FF2B5EF4-FFF2-40B4-BE49-F238E27FC236}">
-                <a16:creationId xmlns:a16="http://schemas.microsoft.com/office/drawing/2014/main" id="{A320AA09-F37B-D9AB-7DA3-D780F2220E34}"/>
+                <a16:creationId xmlns:a16="http://schemas.microsoft.com/office/drawing/2014/main" id="{0CDB87F0-F358-CDD2-BF5B-CA678FA801A9}"/>
               </a:ext>
             </a:extLst>
           </p:cNvPr>
@@ -2768,7 +2768,7 @@
           <p:cNvPr id="3" name="図プレースホルダー 2">
             <a:extLst>
               <a:ext uri="{FF2B5EF4-FFF2-40B4-BE49-F238E27FC236}">
-                <a16:creationId xmlns:a16="http://schemas.microsoft.com/office/drawing/2014/main" id="{2A1EF59A-DD89-C176-8949-3B8AF36193BF}"/>
+                <a16:creationId xmlns:a16="http://schemas.microsoft.com/office/drawing/2014/main" id="{6F6B5413-4918-FF77-0A91-551231FB388F}"/>
               </a:ext>
             </a:extLst>
           </p:cNvPr>
@@ -2835,7 +2835,7 @@
           <p:cNvPr id="4" name="テキスト プレースホルダー 3">
             <a:extLst>
               <a:ext uri="{FF2B5EF4-FFF2-40B4-BE49-F238E27FC236}">
-                <a16:creationId xmlns:a16="http://schemas.microsoft.com/office/drawing/2014/main" id="{FA6D9CD9-445D-21ED-B15A-FC668574BAF9}"/>
+                <a16:creationId xmlns:a16="http://schemas.microsoft.com/office/drawing/2014/main" id="{A6D87704-4CC0-F459-624E-7EEC6BF1608E}"/>
               </a:ext>
             </a:extLst>
           </p:cNvPr>
@@ -2906,7 +2906,7 @@
           <p:cNvPr id="5" name="日付プレースホルダー 4">
             <a:extLst>
               <a:ext uri="{FF2B5EF4-FFF2-40B4-BE49-F238E27FC236}">
-                <a16:creationId xmlns:a16="http://schemas.microsoft.com/office/drawing/2014/main" id="{AD098747-9E4D-34BD-C825-E61B4882FD6C}"/>
+                <a16:creationId xmlns:a16="http://schemas.microsoft.com/office/drawing/2014/main" id="{3314B10B-A0D4-8FF8-B392-EC36F80B03F1}"/>
               </a:ext>
             </a:extLst>
           </p:cNvPr>
@@ -2922,7 +2922,7 @@
           <a:bodyPr/>
           <a:lstStyle/>
           <a:p>
-            <a:fld id="{8228C3E9-62B0-4913-9FEF-24C0F66CC692}" type="datetimeFigureOut">
+            <a:fld id="{748D11BB-60A2-44D6-850A-31AD77DE6E7A}" type="datetimeFigureOut">
               <a:rPr kumimoji="1" lang="ja-JP" altLang="en-US" smtClean="0"/>
               <a:t>2026/7/30</a:t>
             </a:fld>
@@ -2935,7 +2935,7 @@
           <p:cNvPr id="6" name="フッター プレースホルダー 5">
             <a:extLst>
               <a:ext uri="{FF2B5EF4-FFF2-40B4-BE49-F238E27FC236}">
-                <a16:creationId xmlns:a16="http://schemas.microsoft.com/office/drawing/2014/main" id="{E2A00DD4-FA43-ED38-F57E-9FCB2D077650}"/>
+                <a16:creationId xmlns:a16="http://schemas.microsoft.com/office/drawing/2014/main" id="{27933005-6294-84DE-1148-804239E29E57}"/>
               </a:ext>
             </a:extLst>
           </p:cNvPr>
@@ -2960,7 +2960,7 @@
           <p:cNvPr id="7" name="スライド番号プレースホルダー 6">
             <a:extLst>
               <a:ext uri="{FF2B5EF4-FFF2-40B4-BE49-F238E27FC236}">
-                <a16:creationId xmlns:a16="http://schemas.microsoft.com/office/drawing/2014/main" id="{311EC92E-6184-F643-00BB-C8D6909FF792}"/>
+                <a16:creationId xmlns:a16="http://schemas.microsoft.com/office/drawing/2014/main" id="{63927057-7CB8-E7D9-0B6D-B82F758DD48F}"/>
               </a:ext>
             </a:extLst>
           </p:cNvPr>
@@ -2976,7 +2976,7 @@
           <a:bodyPr/>
           <a:lstStyle/>
           <a:p>
-            <a:fld id="{82866816-3BA9-466F-9365-FD6AB950324E}" type="slidenum">
+            <a:fld id="{4450D7FB-1E61-44A1-BEC8-ACF57906F333}" type="slidenum">
               <a:rPr kumimoji="1" lang="ja-JP" altLang="en-US" smtClean="0"/>
               <a:t>‹#›</a:t>
             </a:fld>
@@ -2987,7 +2987,7 @@
     </p:spTree>
     <p:extLst>
       <p:ext uri="{BB962C8B-B14F-4D97-AF65-F5344CB8AC3E}">
-        <p14:creationId xmlns:p14="http://schemas.microsoft.com/office/powerpoint/2010/main" val="4152927430"/>
+        <p14:creationId xmlns:p14="http://schemas.microsoft.com/office/powerpoint/2010/main" val="2510669384"/>
       </p:ext>
     </p:extLst>
   </p:cSld>
@@ -3024,7 +3024,7 @@
           <p:cNvPr id="2" name="タイトル プレースホルダー 1">
             <a:extLst>
               <a:ext uri="{FF2B5EF4-FFF2-40B4-BE49-F238E27FC236}">
-                <a16:creationId xmlns:a16="http://schemas.microsoft.com/office/drawing/2014/main" id="{01984BA0-2781-C352-43A2-B17945DB37AB}"/>
+                <a16:creationId xmlns:a16="http://schemas.microsoft.com/office/drawing/2014/main" id="{E6E3A622-7C2F-6761-8F19-FCC52B9BBE6C}"/>
               </a:ext>
             </a:extLst>
           </p:cNvPr>
@@ -3062,7 +3062,7 @@
           <p:cNvPr id="3" name="テキスト プレースホルダー 2">
             <a:extLst>
               <a:ext uri="{FF2B5EF4-FFF2-40B4-BE49-F238E27FC236}">
-                <a16:creationId xmlns:a16="http://schemas.microsoft.com/office/drawing/2014/main" id="{27406276-E5AC-3FD3-E2BC-0210439DC830}"/>
+                <a16:creationId xmlns:a16="http://schemas.microsoft.com/office/drawing/2014/main" id="{AA7F1F09-9DF8-82E8-70C5-D0D47B5C7C88}"/>
               </a:ext>
             </a:extLst>
           </p:cNvPr>
@@ -3161,7 +3161,7 @@
           <p:cNvPr id="4" name="日付プレースホルダー 3">
             <a:extLst>
               <a:ext uri="{FF2B5EF4-FFF2-40B4-BE49-F238E27FC236}">
-                <a16:creationId xmlns:a16="http://schemas.microsoft.com/office/drawing/2014/main" id="{47523EC0-A02E-439F-1855-971D60EFB327}"/>
+                <a16:creationId xmlns:a16="http://schemas.microsoft.com/office/drawing/2014/main" id="{B3430674-21B1-1C7D-C9B0-D74383916629}"/>
               </a:ext>
             </a:extLst>
           </p:cNvPr>
@@ -3195,7 +3195,7 @@
             </a:lvl1pPr>
           </a:lstStyle>
           <a:p>
-            <a:fld id="{8228C3E9-62B0-4913-9FEF-24C0F66CC692}" type="datetimeFigureOut">
+            <a:fld id="{748D11BB-60A2-44D6-850A-31AD77DE6E7A}" type="datetimeFigureOut">
               <a:rPr kumimoji="1" lang="ja-JP" altLang="en-US" smtClean="0"/>
               <a:t>2026/7/30</a:t>
             </a:fld>
@@ -3208,7 +3208,7 @@
           <p:cNvPr id="5" name="フッター プレースホルダー 4">
             <a:extLst>
               <a:ext uri="{FF2B5EF4-FFF2-40B4-BE49-F238E27FC236}">
-                <a16:creationId xmlns:a16="http://schemas.microsoft.com/office/drawing/2014/main" id="{2FD49B2D-784A-D916-7192-D34886CAE0C0}"/>
+                <a16:creationId xmlns:a16="http://schemas.microsoft.com/office/drawing/2014/main" id="{7B6CAC39-A83B-259B-097E-63E46CC47622}"/>
               </a:ext>
             </a:extLst>
           </p:cNvPr>
@@ -3251,7 +3251,7 @@
           <p:cNvPr id="6" name="スライド番号プレースホルダー 5">
             <a:extLst>
               <a:ext uri="{FF2B5EF4-FFF2-40B4-BE49-F238E27FC236}">
-                <a16:creationId xmlns:a16="http://schemas.microsoft.com/office/drawing/2014/main" id="{4C733CCA-C90C-8856-16B3-A703BF303A25}"/>
+                <a16:creationId xmlns:a16="http://schemas.microsoft.com/office/drawing/2014/main" id="{4F6C9604-512E-51A5-0D02-3506D92ED1DB}"/>
               </a:ext>
             </a:extLst>
           </p:cNvPr>
@@ -3285,7 +3285,7 @@
             </a:lvl1pPr>
           </a:lstStyle>
           <a:p>
-            <a:fld id="{82866816-3BA9-466F-9365-FD6AB950324E}" type="slidenum">
+            <a:fld id="{4450D7FB-1E61-44A1-BEC8-ACF57906F333}" type="slidenum">
               <a:rPr kumimoji="1" lang="ja-JP" altLang="en-US" smtClean="0"/>
               <a:t>‹#›</a:t>
             </a:fld>
@@ -3296,7 +3296,7 @@
     </p:spTree>
     <p:extLst>
       <p:ext uri="{BB962C8B-B14F-4D97-AF65-F5344CB8AC3E}">
-        <p14:creationId xmlns:p14="http://schemas.microsoft.com/office/powerpoint/2010/main" val="1721723194"/>
+        <p14:creationId xmlns:p14="http://schemas.microsoft.com/office/powerpoint/2010/main" val="314709615"/>
       </p:ext>
     </p:extLst>
   </p:cSld>
@@ -3619,7 +3619,7 @@
           <p:cNvPr id="2" name="テキスト ボックス 1">
             <a:extLst>
               <a:ext uri="{FF2B5EF4-FFF2-40B4-BE49-F238E27FC236}">
-                <a16:creationId xmlns:a16="http://schemas.microsoft.com/office/drawing/2014/main" id="{3A481D01-956D-F4D6-F775-F6D969523B18}"/>
+                <a16:creationId xmlns:a16="http://schemas.microsoft.com/office/drawing/2014/main" id="{EFE44DCE-7F33-DC6F-CFF3-741382BB5F6C}"/>
               </a:ext>
             </a:extLst>
           </p:cNvPr>
@@ -3665,7 +3665,7 @@
           <p:cNvPr id="3" name="テキスト ボックス 2">
             <a:extLst>
               <a:ext uri="{FF2B5EF4-FFF2-40B4-BE49-F238E27FC236}">
-                <a16:creationId xmlns:a16="http://schemas.microsoft.com/office/drawing/2014/main" id="{F067077A-A535-D063-F29A-637813098922}"/>
+                <a16:creationId xmlns:a16="http://schemas.microsoft.com/office/drawing/2014/main" id="{59EF2A81-EF44-0804-AE9A-A115927D42E0}"/>
               </a:ext>
             </a:extLst>
           </p:cNvPr>
@@ -3714,7 +3714,7 @@
           <p:cNvPr id="4" name="テキスト ボックス 3">
             <a:extLst>
               <a:ext uri="{FF2B5EF4-FFF2-40B4-BE49-F238E27FC236}">
-                <a16:creationId xmlns:a16="http://schemas.microsoft.com/office/drawing/2014/main" id="{68439C8E-F65D-286D-4E49-E08A69ED1A99}"/>
+                <a16:creationId xmlns:a16="http://schemas.microsoft.com/office/drawing/2014/main" id="{8862D6A6-18B7-DC63-7059-3A423C0DF75A}"/>
               </a:ext>
             </a:extLst>
           </p:cNvPr>
@@ -3754,7 +3754,7 @@
           <p:cNvPr id="5" name="テキスト ボックス 4">
             <a:extLst>
               <a:ext uri="{FF2B5EF4-FFF2-40B4-BE49-F238E27FC236}">
-                <a16:creationId xmlns:a16="http://schemas.microsoft.com/office/drawing/2014/main" id="{44929C8F-EBE8-5313-C98A-46110752A677}"/>
+                <a16:creationId xmlns:a16="http://schemas.microsoft.com/office/drawing/2014/main" id="{C268E992-151A-5588-6111-15C751725558}"/>
               </a:ext>
             </a:extLst>
           </p:cNvPr>
@@ -3801,7 +3801,7 @@
             <a:hlinkClick r:id="" action="ppaction://media"/>
             <a:extLst>
               <a:ext uri="{FF2B5EF4-FFF2-40B4-BE49-F238E27FC236}">
-                <a16:creationId xmlns:a16="http://schemas.microsoft.com/office/drawing/2014/main" id="{9CDFFEA1-34C8-137B-767B-E90593613374}"/>
+                <a16:creationId xmlns:a16="http://schemas.microsoft.com/office/drawing/2014/main" id="{4FBEB901-5C1A-A4B4-A287-3B756303B827}"/>
               </a:ext>
             </a:extLst>
           </p:cNvPr>
@@ -3836,7 +3836,7 @@
     </p:spTree>
     <p:extLst>
       <p:ext uri="{BB962C8B-B14F-4D97-AF65-F5344CB8AC3E}">
-        <p14:creationId xmlns:p14="http://schemas.microsoft.com/office/powerpoint/2010/main" val="1657847842"/>
+        <p14:creationId xmlns:p14="http://schemas.microsoft.com/office/powerpoint/2010/main" val="1993807208"/>
       </p:ext>
     </p:extLst>
   </p:cSld>
@@ -3960,7 +3960,7 @@
           <p:cNvPr id="2" name="テキスト ボックス 1">
             <a:extLst>
               <a:ext uri="{FF2B5EF4-FFF2-40B4-BE49-F238E27FC236}">
-                <a16:creationId xmlns:a16="http://schemas.microsoft.com/office/drawing/2014/main" id="{D1E27BE7-39B0-CA72-BB7E-064857859584}"/>
+                <a16:creationId xmlns:a16="http://schemas.microsoft.com/office/drawing/2014/main" id="{E26D9C9F-0ADB-3F7F-7DC8-0277796C25BF}"/>
               </a:ext>
             </a:extLst>
           </p:cNvPr>
@@ -4006,7 +4006,7 @@
           <p:cNvPr id="3" name="テキスト ボックス 2">
             <a:extLst>
               <a:ext uri="{FF2B5EF4-FFF2-40B4-BE49-F238E27FC236}">
-                <a16:creationId xmlns:a16="http://schemas.microsoft.com/office/drawing/2014/main" id="{BEC9D90C-F9E8-9C8D-752B-2470DD48AD96}"/>
+                <a16:creationId xmlns:a16="http://schemas.microsoft.com/office/drawing/2014/main" id="{CD07175D-D486-1F3A-7F03-663F724EB2A5}"/>
               </a:ext>
             </a:extLst>
           </p:cNvPr>
@@ -4046,7 +4046,7 @@
           <p:cNvPr id="4" name="テキスト ボックス 3">
             <a:extLst>
               <a:ext uri="{FF2B5EF4-FFF2-40B4-BE49-F238E27FC236}">
-                <a16:creationId xmlns:a16="http://schemas.microsoft.com/office/drawing/2014/main" id="{1975737C-D0DF-41DB-3765-7F3D21139692}"/>
+                <a16:creationId xmlns:a16="http://schemas.microsoft.com/office/drawing/2014/main" id="{BC5FE491-7054-D632-7FF4-6D808D1FB6EF}"/>
               </a:ext>
             </a:extLst>
           </p:cNvPr>
@@ -4076,14 +4076,17 @@
                 </a:solidFill>
                 <a:latin typeface="Arial" panose="020B0604020202020204" pitchFamily="34" charset="0"/>
               </a:rPr>
-              <a:t>About Laravel Laravel is a web application framework with expressive, elegant syntax</a:t>
-            </a:r>
-            <a:endParaRPr kumimoji="1" lang="ja-JP" altLang="en-US" sz="2000">
-              <a:solidFill>
-                <a:srgbClr val="333333"/>
-              </a:solidFill>
-              <a:latin typeface="Arial" panose="020B0604020202020204" pitchFamily="34" charset="0"/>
-            </a:endParaRPr>
+              <a:t>Laravel Posting App</a:t>
+            </a:r>
+            <a:r>
+              <a:rPr kumimoji="1" lang="ja-JP" altLang="en-US" sz="2000">
+                <a:solidFill>
+                  <a:srgbClr val="333333"/>
+                </a:solidFill>
+                <a:latin typeface="Arial" panose="020B0604020202020204" pitchFamily="34" charset="0"/>
+              </a:rPr>
+              <a:t>の目的、構成、実装を公開コードから確認できるプロジェクトです。</a:t>
+            </a:r>
           </a:p>
         </p:txBody>
       </p:sp>
@@ -4092,7 +4095,7 @@
           <p:cNvPr id="5" name="テキスト ボックス 4">
             <a:extLst>
               <a:ext uri="{FF2B5EF4-FFF2-40B4-BE49-F238E27FC236}">
-                <a16:creationId xmlns:a16="http://schemas.microsoft.com/office/drawing/2014/main" id="{157837DE-4511-1420-3371-D4678F6A1C66}"/>
+                <a16:creationId xmlns:a16="http://schemas.microsoft.com/office/drawing/2014/main" id="{B223734E-4CE0-CAC2-7EDD-81861C0B57DB}"/>
               </a:ext>
             </a:extLst>
           </p:cNvPr>
@@ -4139,7 +4142,7 @@
             <a:hlinkClick r:id="" action="ppaction://media"/>
             <a:extLst>
               <a:ext uri="{FF2B5EF4-FFF2-40B4-BE49-F238E27FC236}">
-                <a16:creationId xmlns:a16="http://schemas.microsoft.com/office/drawing/2014/main" id="{162E8A2A-9607-5014-5AE4-8D24430D2FBD}"/>
+                <a16:creationId xmlns:a16="http://schemas.microsoft.com/office/drawing/2014/main" id="{36A4385B-83A0-1351-B359-8F4840402D8D}"/>
               </a:ext>
             </a:extLst>
           </p:cNvPr>
@@ -4174,7 +4177,7 @@
     </p:spTree>
     <p:extLst>
       <p:ext uri="{BB962C8B-B14F-4D97-AF65-F5344CB8AC3E}">
-        <p14:creationId xmlns:p14="http://schemas.microsoft.com/office/powerpoint/2010/main" val="2614739622"/>
+        <p14:creationId xmlns:p14="http://schemas.microsoft.com/office/powerpoint/2010/main" val="1343195049"/>
       </p:ext>
     </p:extLst>
   </p:cSld>
@@ -4217,7 +4220,7 @@
                                   <p:childTnLst>
                                     <p:cmd type="call" cmd="playFrom(0.0)">
                                       <p:cBhvr>
-                                        <p:cTn id="6" dur="7780" fill="hold"/>
+                                        <p:cTn id="6" dur="7761" fill="hold"/>
                                         <p:tgtEl>
                                           <p:spTgt spid="6"/>
                                         </p:tgtEl>
@@ -4298,7 +4301,7 @@
           <p:cNvPr id="2" name="テキスト ボックス 1">
             <a:extLst>
               <a:ext uri="{FF2B5EF4-FFF2-40B4-BE49-F238E27FC236}">
-                <a16:creationId xmlns:a16="http://schemas.microsoft.com/office/drawing/2014/main" id="{12BA65AB-8CB0-0E10-E3AD-98677E19AD2E}"/>
+                <a16:creationId xmlns:a16="http://schemas.microsoft.com/office/drawing/2014/main" id="{606E74C0-29BF-5B68-8389-69D37ACB4142}"/>
               </a:ext>
             </a:extLst>
           </p:cNvPr>
@@ -4344,7 +4347,7 @@
           <p:cNvPr id="3" name="テキスト ボックス 2">
             <a:extLst>
               <a:ext uri="{FF2B5EF4-FFF2-40B4-BE49-F238E27FC236}">
-                <a16:creationId xmlns:a16="http://schemas.microsoft.com/office/drawing/2014/main" id="{8A0E5734-4C43-0773-FE71-E1D6C3E94ED0}"/>
+                <a16:creationId xmlns:a16="http://schemas.microsoft.com/office/drawing/2014/main" id="{FD32B305-B41F-64FD-897A-B9D361EEB126}"/>
               </a:ext>
             </a:extLst>
           </p:cNvPr>
@@ -4384,7 +4387,7 @@
           <p:cNvPr id="4" name="テキスト ボックス 3">
             <a:extLst>
               <a:ext uri="{FF2B5EF4-FFF2-40B4-BE49-F238E27FC236}">
-                <a16:creationId xmlns:a16="http://schemas.microsoft.com/office/drawing/2014/main" id="{2CCADDC4-DBC1-1126-F7C9-42BD12BEC48E}"/>
+                <a16:creationId xmlns:a16="http://schemas.microsoft.com/office/drawing/2014/main" id="{A330068C-9FAB-2A6F-1248-4F63643EA34D}"/>
               </a:ext>
             </a:extLst>
           </p:cNvPr>
@@ -4497,7 +4500,7 @@
           <p:cNvPr id="5" name="テキスト ボックス 4">
             <a:extLst>
               <a:ext uri="{FF2B5EF4-FFF2-40B4-BE49-F238E27FC236}">
-                <a16:creationId xmlns:a16="http://schemas.microsoft.com/office/drawing/2014/main" id="{8A1C5ADC-4927-1F09-B5DB-4362AF11325C}"/>
+                <a16:creationId xmlns:a16="http://schemas.microsoft.com/office/drawing/2014/main" id="{4DF4FABA-1028-4DBD-27A5-34EBFF1B787C}"/>
               </a:ext>
             </a:extLst>
           </p:cNvPr>
@@ -4544,7 +4547,7 @@
             <a:hlinkClick r:id="" action="ppaction://media"/>
             <a:extLst>
               <a:ext uri="{FF2B5EF4-FFF2-40B4-BE49-F238E27FC236}">
-                <a16:creationId xmlns:a16="http://schemas.microsoft.com/office/drawing/2014/main" id="{C8AB7791-8910-BB35-ECF3-AFFA4CA73F06}"/>
+                <a16:creationId xmlns:a16="http://schemas.microsoft.com/office/drawing/2014/main" id="{D389EBF7-7A18-AE59-131A-A69EF0097E68}"/>
               </a:ext>
             </a:extLst>
           </p:cNvPr>
@@ -4579,7 +4582,7 @@
     </p:spTree>
     <p:extLst>
       <p:ext uri="{BB962C8B-B14F-4D97-AF65-F5344CB8AC3E}">
-        <p14:creationId xmlns:p14="http://schemas.microsoft.com/office/powerpoint/2010/main" val="2692496701"/>
+        <p14:creationId xmlns:p14="http://schemas.microsoft.com/office/powerpoint/2010/main" val="4111128896"/>
       </p:ext>
     </p:extLst>
   </p:cSld>
@@ -4703,7 +4706,7 @@
           <p:cNvPr id="2" name="テキスト ボックス 1">
             <a:extLst>
               <a:ext uri="{FF2B5EF4-FFF2-40B4-BE49-F238E27FC236}">
-                <a16:creationId xmlns:a16="http://schemas.microsoft.com/office/drawing/2014/main" id="{74F80943-1EA7-CC57-5C41-AAF95730FEC9}"/>
+                <a16:creationId xmlns:a16="http://schemas.microsoft.com/office/drawing/2014/main" id="{D2EAD23B-B614-7519-7764-A785D746C4D1}"/>
               </a:ext>
             </a:extLst>
           </p:cNvPr>
@@ -4749,7 +4752,7 @@
           <p:cNvPr id="3" name="テキスト ボックス 2">
             <a:extLst>
               <a:ext uri="{FF2B5EF4-FFF2-40B4-BE49-F238E27FC236}">
-                <a16:creationId xmlns:a16="http://schemas.microsoft.com/office/drawing/2014/main" id="{0F4254ED-8D3D-B6E3-1BA2-AE1A983A65D5}"/>
+                <a16:creationId xmlns:a16="http://schemas.microsoft.com/office/drawing/2014/main" id="{EC86DE92-04B8-74B7-2F81-D55657E3B5F9}"/>
               </a:ext>
             </a:extLst>
           </p:cNvPr>
@@ -4789,7 +4792,7 @@
           <p:cNvPr id="4" name="テキスト ボックス 3">
             <a:extLst>
               <a:ext uri="{FF2B5EF4-FFF2-40B4-BE49-F238E27FC236}">
-                <a16:creationId xmlns:a16="http://schemas.microsoft.com/office/drawing/2014/main" id="{50A51342-A1AE-7604-6983-3BB363ED8AED}"/>
+                <a16:creationId xmlns:a16="http://schemas.microsoft.com/office/drawing/2014/main" id="{197C76C6-7869-8920-1532-5AF1EF0A6E03}"/>
               </a:ext>
             </a:extLst>
           </p:cNvPr>
@@ -4899,7 +4902,7 @@
           <p:cNvPr id="5" name="テキスト ボックス 4">
             <a:extLst>
               <a:ext uri="{FF2B5EF4-FFF2-40B4-BE49-F238E27FC236}">
-                <a16:creationId xmlns:a16="http://schemas.microsoft.com/office/drawing/2014/main" id="{74597988-3A94-AA70-09BC-F826824C6CCE}"/>
+                <a16:creationId xmlns:a16="http://schemas.microsoft.com/office/drawing/2014/main" id="{D23A3C51-0AC9-02DF-4436-0B6F9914ACC6}"/>
               </a:ext>
             </a:extLst>
           </p:cNvPr>
@@ -4946,7 +4949,7 @@
             <a:hlinkClick r:id="" action="ppaction://media"/>
             <a:extLst>
               <a:ext uri="{FF2B5EF4-FFF2-40B4-BE49-F238E27FC236}">
-                <a16:creationId xmlns:a16="http://schemas.microsoft.com/office/drawing/2014/main" id="{14CE870D-B42E-F6F9-BFCF-ACB440859F17}"/>
+                <a16:creationId xmlns:a16="http://schemas.microsoft.com/office/drawing/2014/main" id="{BEA4FFDA-CFE9-07EC-EBAB-8F2C2E30AEBB}"/>
               </a:ext>
             </a:extLst>
           </p:cNvPr>
@@ -4981,7 +4984,7 @@
     </p:spTree>
     <p:extLst>
       <p:ext uri="{BB962C8B-B14F-4D97-AF65-F5344CB8AC3E}">
-        <p14:creationId xmlns:p14="http://schemas.microsoft.com/office/powerpoint/2010/main" val="340441230"/>
+        <p14:creationId xmlns:p14="http://schemas.microsoft.com/office/powerpoint/2010/main" val="3281764046"/>
       </p:ext>
     </p:extLst>
   </p:cSld>
@@ -5105,7 +5108,7 @@
           <p:cNvPr id="2" name="テキスト ボックス 1">
             <a:extLst>
               <a:ext uri="{FF2B5EF4-FFF2-40B4-BE49-F238E27FC236}">
-                <a16:creationId xmlns:a16="http://schemas.microsoft.com/office/drawing/2014/main" id="{1294274D-37F8-D549-CB54-1A8F26EEA4EA}"/>
+                <a16:creationId xmlns:a16="http://schemas.microsoft.com/office/drawing/2014/main" id="{6E15AA4A-F499-312F-4B28-DA8B7AA1F349}"/>
               </a:ext>
             </a:extLst>
           </p:cNvPr>
@@ -5151,7 +5154,7 @@
           <p:cNvPr id="3" name="テキスト ボックス 2">
             <a:extLst>
               <a:ext uri="{FF2B5EF4-FFF2-40B4-BE49-F238E27FC236}">
-                <a16:creationId xmlns:a16="http://schemas.microsoft.com/office/drawing/2014/main" id="{CA06CCEF-4A1A-B39A-2E70-FB7411F85D43}"/>
+                <a16:creationId xmlns:a16="http://schemas.microsoft.com/office/drawing/2014/main" id="{EA0D1034-4B33-DB91-C4CA-A4F46A06A1DB}"/>
               </a:ext>
             </a:extLst>
           </p:cNvPr>
@@ -5191,7 +5194,7 @@
           <p:cNvPr id="4" name="テキスト ボックス 3">
             <a:extLst>
               <a:ext uri="{FF2B5EF4-FFF2-40B4-BE49-F238E27FC236}">
-                <a16:creationId xmlns:a16="http://schemas.microsoft.com/office/drawing/2014/main" id="{C03BC59D-8E13-FD82-A645-94E113883194}"/>
+                <a16:creationId xmlns:a16="http://schemas.microsoft.com/office/drawing/2014/main" id="{7E29D888-6855-795D-CA2C-6A454489EFF8}"/>
               </a:ext>
             </a:extLst>
           </p:cNvPr>
@@ -5201,7 +5204,7 @@
         <p:spPr>
           <a:xfrm>
             <a:off x="533400" y="3429000"/>
-            <a:ext cx="10795000" cy="707886"/>
+            <a:ext cx="10795000" cy="400110"/>
           </a:xfrm>
           <a:prstGeom prst="rect">
             <a:avLst/>
@@ -5215,76 +5218,13 @@
           <a:lstStyle/>
           <a:p>
             <a:r>
-              <a:rPr kumimoji="1" lang="en-US" altLang="ja-JP" sz="2000">
-                <a:solidFill>
-                  <a:srgbClr val="333333"/>
-                </a:solidFill>
-                <a:latin typeface="Arial" panose="020B0604020202020204" pitchFamily="34" charset="0"/>
-              </a:rPr>
-              <a:t>JSON-LD</a:t>
-            </a:r>
-            <a:r>
               <a:rPr kumimoji="1" lang="ja-JP" altLang="en-US" sz="2000">
                 <a:solidFill>
                   <a:srgbClr val="333333"/>
                 </a:solidFill>
                 <a:latin typeface="Arial" panose="020B0604020202020204" pitchFamily="34" charset="0"/>
               </a:rPr>
-              <a:t>の</a:t>
-            </a:r>
-            <a:r>
-              <a:rPr kumimoji="1" lang="en-US" altLang="ja-JP" sz="2000">
-                <a:solidFill>
-                  <a:srgbClr val="333333"/>
-                </a:solidFill>
-                <a:latin typeface="Arial" panose="020B0604020202020204" pitchFamily="34" charset="0"/>
-              </a:rPr>
-              <a:t>blade</a:t>
-            </a:r>
-            <a:r>
-              <a:rPr kumimoji="1" lang="ja-JP" altLang="en-US" sz="2000">
-                <a:solidFill>
-                  <a:srgbClr val="333333"/>
-                </a:solidFill>
-                <a:latin typeface="Arial" panose="020B0604020202020204" pitchFamily="34" charset="0"/>
-              </a:rPr>
-              <a:t>テンプレートで</a:t>
-            </a:r>
-            <a:r>
-              <a:rPr kumimoji="1" lang="en-US" altLang="ja-JP" sz="2000">
-                <a:solidFill>
-                  <a:srgbClr val="333333"/>
-                </a:solidFill>
-                <a:latin typeface="Arial" panose="020B0604020202020204" pitchFamily="34" charset="0"/>
-              </a:rPr>
-              <a:t>@context</a:t>
-            </a:r>
-            <a:r>
-              <a:rPr kumimoji="1" lang="ja-JP" altLang="en-US" sz="2000">
-                <a:solidFill>
-                  <a:srgbClr val="333333"/>
-                </a:solidFill>
-                <a:latin typeface="Arial" panose="020B0604020202020204" pitchFamily="34" charset="0"/>
-              </a:rPr>
-              <a:t>が</a:t>
-            </a:r>
-            <a:r>
-              <a:rPr kumimoji="1" lang="en-US" altLang="ja-JP" sz="2000">
-                <a:solidFill>
-                  <a:srgbClr val="333333"/>
-                </a:solidFill>
-                <a:latin typeface="Arial" panose="020B0604020202020204" pitchFamily="34" charset="0"/>
-              </a:rPr>
-              <a:t>Laravel</a:t>
-            </a:r>
-            <a:r>
-              <a:rPr kumimoji="1" lang="ja-JP" altLang="en-US" sz="2000">
-                <a:solidFill>
-                  <a:srgbClr val="333333"/>
-                </a:solidFill>
-                <a:latin typeface="Arial" panose="020B0604020202020204" pitchFamily="34" charset="0"/>
-              </a:rPr>
-              <a:t>の予約ディレクティブと衝突していたバグを修正</a:t>
+              <a:t>直近のコミットでは、実装の見直しと継続的な改善が行われました。</a:t>
             </a:r>
           </a:p>
         </p:txBody>
@@ -5294,7 +5234,7 @@
           <p:cNvPr id="5" name="テキスト ボックス 4">
             <a:extLst>
               <a:ext uri="{FF2B5EF4-FFF2-40B4-BE49-F238E27FC236}">
-                <a16:creationId xmlns:a16="http://schemas.microsoft.com/office/drawing/2014/main" id="{F0EA2488-B5BF-0C45-B47C-E6C15494F238}"/>
+                <a16:creationId xmlns:a16="http://schemas.microsoft.com/office/drawing/2014/main" id="{91281908-81ED-61A0-3A05-FBE7E6D6CD6A}"/>
               </a:ext>
             </a:extLst>
           </p:cNvPr>
@@ -5341,7 +5281,7 @@
             <a:hlinkClick r:id="" action="ppaction://media"/>
             <a:extLst>
               <a:ext uri="{FF2B5EF4-FFF2-40B4-BE49-F238E27FC236}">
-                <a16:creationId xmlns:a16="http://schemas.microsoft.com/office/drawing/2014/main" id="{50887CA5-6926-90B1-F915-CB088715EBDD}"/>
+                <a16:creationId xmlns:a16="http://schemas.microsoft.com/office/drawing/2014/main" id="{0627CE71-8DC6-FE33-B20A-4C626A0BFD65}"/>
               </a:ext>
             </a:extLst>
           </p:cNvPr>
@@ -5376,7 +5316,7 @@
     </p:spTree>
     <p:extLst>
       <p:ext uri="{BB962C8B-B14F-4D97-AF65-F5344CB8AC3E}">
-        <p14:creationId xmlns:p14="http://schemas.microsoft.com/office/powerpoint/2010/main" val="2744761965"/>
+        <p14:creationId xmlns:p14="http://schemas.microsoft.com/office/powerpoint/2010/main" val="2296413020"/>
       </p:ext>
     </p:extLst>
   </p:cSld>
@@ -5385,10 +5325,10 @@
   </p:clrMapOvr>
   <mc:AlternateContent xmlns:mc="http://schemas.openxmlformats.org/markup-compatibility/2006">
     <mc:Choice xmlns:p14="http://schemas.microsoft.com/office/powerpoint/2010/main" Requires="p14">
-      <p:transition spd="slow" p14:dur="2000" advTm="12000"/>
+      <p:transition spd="slow" p14:dur="2000" advTm="7000"/>
     </mc:Choice>
     <mc:Fallback>
-      <p:transition spd="slow" advTm="12000"/>
+      <p:transition spd="slow" advTm="7000"/>
     </mc:Fallback>
   </mc:AlternateContent>
   <p:timing>
@@ -5419,7 +5359,7 @@
                                   <p:childTnLst>
                                     <p:cmd type="call" cmd="playFrom(0.0)">
                                       <p:cBhvr>
-                                        <p:cTn id="6" dur="11394" fill="hold"/>
+                                        <p:cTn id="6" dur="6076" fill="hold"/>
                                         <p:tgtEl>
                                           <p:spTgt spid="6"/>
                                         </p:tgtEl>
@@ -5500,7 +5440,7 @@
           <p:cNvPr id="2" name="テキスト ボックス 1">
             <a:extLst>
               <a:ext uri="{FF2B5EF4-FFF2-40B4-BE49-F238E27FC236}">
-                <a16:creationId xmlns:a16="http://schemas.microsoft.com/office/drawing/2014/main" id="{3F547437-FE90-9380-BB3D-9A19D474FBF2}"/>
+                <a16:creationId xmlns:a16="http://schemas.microsoft.com/office/drawing/2014/main" id="{F6489E73-0B98-C843-A813-4219DF7D905B}"/>
               </a:ext>
             </a:extLst>
           </p:cNvPr>
@@ -5546,7 +5486,7 @@
           <p:cNvPr id="3" name="テキスト ボックス 2">
             <a:extLst>
               <a:ext uri="{FF2B5EF4-FFF2-40B4-BE49-F238E27FC236}">
-                <a16:creationId xmlns:a16="http://schemas.microsoft.com/office/drawing/2014/main" id="{2D808CAB-CEAC-5082-8B9E-F37B5F34BDD3}"/>
+                <a16:creationId xmlns:a16="http://schemas.microsoft.com/office/drawing/2014/main" id="{5A577A3B-47D5-3959-C276-B6CD5C61124C}"/>
               </a:ext>
             </a:extLst>
           </p:cNvPr>
@@ -5586,7 +5526,7 @@
           <p:cNvPr id="4" name="テキスト ボックス 3">
             <a:extLst>
               <a:ext uri="{FF2B5EF4-FFF2-40B4-BE49-F238E27FC236}">
-                <a16:creationId xmlns:a16="http://schemas.microsoft.com/office/drawing/2014/main" id="{9C16E711-06A1-869C-3603-A356118C3616}"/>
+                <a16:creationId xmlns:a16="http://schemas.microsoft.com/office/drawing/2014/main" id="{BD36FC42-1BD8-4980-F33D-22C91035C9B3}"/>
               </a:ext>
             </a:extLst>
           </p:cNvPr>
@@ -5651,7 +5591,7 @@
           <p:cNvPr id="5" name="テキスト ボックス 4">
             <a:extLst>
               <a:ext uri="{FF2B5EF4-FFF2-40B4-BE49-F238E27FC236}">
-                <a16:creationId xmlns:a16="http://schemas.microsoft.com/office/drawing/2014/main" id="{F0EE9794-0755-0C3C-8062-5A5BDB280E21}"/>
+                <a16:creationId xmlns:a16="http://schemas.microsoft.com/office/drawing/2014/main" id="{5E2D8766-014F-F592-2B88-D1388CC21A58}"/>
               </a:ext>
             </a:extLst>
           </p:cNvPr>
@@ -5698,7 +5638,7 @@
             <a:hlinkClick r:id="" action="ppaction://media"/>
             <a:extLst>
               <a:ext uri="{FF2B5EF4-FFF2-40B4-BE49-F238E27FC236}">
-                <a16:creationId xmlns:a16="http://schemas.microsoft.com/office/drawing/2014/main" id="{ED00AE14-D973-D1EB-2A2A-D3C6BA1B5F3B}"/>
+                <a16:creationId xmlns:a16="http://schemas.microsoft.com/office/drawing/2014/main" id="{BB7B6888-4B81-D28E-2CFB-2346304253AA}"/>
               </a:ext>
             </a:extLst>
           </p:cNvPr>
@@ -5733,7 +5673,7 @@
     </p:spTree>
     <p:extLst>
       <p:ext uri="{BB962C8B-B14F-4D97-AF65-F5344CB8AC3E}">
-        <p14:creationId xmlns:p14="http://schemas.microsoft.com/office/powerpoint/2010/main" val="420297009"/>
+        <p14:creationId xmlns:p14="http://schemas.microsoft.com/office/powerpoint/2010/main" val="492046092"/>
       </p:ext>
     </p:extLst>
   </p:cSld>
